--- a/curso/pptx/S58.pptx
+++ b/curso/pptx/S58.pptx
@@ -3891,8 +3891,8 @@
         </p:nvSpPr>
         <p:spPr>
           <a:xfrm>
-            <a:off x="640000" y="420000"/>
-            <a:ext cx="10912000" cy="420000"/>
+            <a:off x="10652000" y="380000"/>
+            <a:ext cx="900000" cy="800000"/>
           </a:xfrm>
           <a:prstGeom prst="rect">
             <a:avLst/>
@@ -3907,17 +3907,17 @@
           <a:p>
             <a:pPr>
               <a:spcAft>
-                <a:spcPts val="810"/>
+                <a:spcPts val="1980"/>
               </a:spcAft>
             </a:pPr>
             <a:r>
-              <a:rPr sz="1800" b="1">
+              <a:rPr sz="4400" b="0">
                 <a:solidFill>
                   <a:srgbClr val="1F2A44"/>
                 </a:solidFill>
                 <a:latin typeface="Nunito Sans"/>
               </a:rPr>
-              <a:t>🦉 Aula de Filosofía</a:t>
+              <a:t>🙃</a:t>
             </a:r>
           </a:p>
         </p:txBody>

--- a/curso/pptx/S58.pptx
+++ b/curso/pptx/S58.pptx
@@ -472,426 +472,6 @@
     </a:lvl9pPr>
   </p:notesStyle>
 </p:notesMaster>
-</file>
-
-<file path=ppt/notesSlides/notesSlide1.xml><?xml version="1.0" encoding="utf-8"?>
-<p:notes xmlns:a="http://schemas.openxmlformats.org/drawingml/2006/main" xmlns:p="http://schemas.openxmlformats.org/presentationml/2006/main" xmlns:r="http://schemas.openxmlformats.org/officeDocument/2006/relationships">
-  <p:cSld>
-    <p:spTree>
-      <p:nvGrpSpPr>
-        <p:cNvPr id="1" name=""/>
-        <p:cNvGrpSpPr/>
-        <p:nvPr/>
-      </p:nvGrpSpPr>
-      <p:grpSpPr>
-        <a:xfrm>
-          <a:off x="0" y="0"/>
-          <a:ext cx="0" cy="0"/>
-          <a:chOff x="0" y="0"/>
-          <a:chExt cx="0" cy="0"/>
-        </a:xfrm>
-      </p:grpSpPr>
-      <p:sp>
-        <p:nvSpPr>
-          <p:cNvPr id="2" name="Slide Image Placeholder 1"/>
-          <p:cNvSpPr>
-            <a:spLocks noGrp="1"/>
-          </p:cNvSpPr>
-          <p:nvPr>
-            <p:ph type="sldImg" idx="2"/>
-          </p:nvPr>
-        </p:nvSpPr>
-        <p:spPr/>
-      </p:sp>
-      <p:sp>
-        <p:nvSpPr>
-          <p:cNvPr id="3" name="Notes Placeholder 2"/>
-          <p:cNvSpPr>
-            <a:spLocks noGrp="1"/>
-          </p:cNvSpPr>
-          <p:nvPr>
-            <p:ph type="body" idx="3" sz="quarter"/>
-          </p:nvPr>
-        </p:nvSpPr>
-        <p:spPr/>
-        <p:txBody>
-          <a:bodyPr/>
-          <a:lstStyle/>
-          <a:p>
-            <a:r>
-              <a:t>3 minutos. Sin apuntes. Es para recordar, no cuenta para nota.</a:t>
-            </a:r>
-          </a:p>
-        </p:txBody>
-      </p:sp>
-      <p:sp>
-        <p:nvSpPr>
-          <p:cNvPr id="4" name="Slide Number Placeholder 3"/>
-          <p:cNvSpPr>
-            <a:spLocks noGrp="1"/>
-          </p:cNvSpPr>
-          <p:nvPr>
-            <p:ph type="sldNum" idx="5" sz="quarter"/>
-          </p:nvPr>
-        </p:nvSpPr>
-        <p:spPr/>
-      </p:sp>
-    </p:spTree>
-  </p:cSld>
-  <p:clrMapOvr>
-    <a:masterClrMapping/>
-  </p:clrMapOvr>
-</p:notes>
-</file>
-
-<file path=ppt/notesSlides/notesSlide2.xml><?xml version="1.0" encoding="utf-8"?>
-<p:notes xmlns:a="http://schemas.openxmlformats.org/drawingml/2006/main" xmlns:p="http://schemas.openxmlformats.org/presentationml/2006/main" xmlns:r="http://schemas.openxmlformats.org/officeDocument/2006/relationships">
-  <p:cSld>
-    <p:spTree>
-      <p:nvGrpSpPr>
-        <p:cNvPr id="1" name=""/>
-        <p:cNvGrpSpPr/>
-        <p:nvPr/>
-      </p:nvGrpSpPr>
-      <p:grpSpPr>
-        <a:xfrm>
-          <a:off x="0" y="0"/>
-          <a:ext cx="0" cy="0"/>
-          <a:chOff x="0" y="0"/>
-          <a:chExt cx="0" cy="0"/>
-        </a:xfrm>
-      </p:grpSpPr>
-      <p:sp>
-        <p:nvSpPr>
-          <p:cNvPr id="2" name="Slide Image Placeholder 1"/>
-          <p:cNvSpPr>
-            <a:spLocks noGrp="1"/>
-          </p:cNvSpPr>
-          <p:nvPr>
-            <p:ph type="sldImg" idx="2"/>
-          </p:nvPr>
-        </p:nvSpPr>
-        <p:spPr/>
-      </p:sp>
-      <p:sp>
-        <p:nvSpPr>
-          <p:cNvPr id="3" name="Notes Placeholder 2"/>
-          <p:cNvSpPr>
-            <a:spLocks noGrp="1"/>
-          </p:cNvSpPr>
-          <p:nvPr>
-            <p:ph type="body" idx="3" sz="quarter"/>
-          </p:nvPr>
-        </p:nvSpPr>
-        <p:spPr/>
-        <p:txBody>
-          <a:bodyPr/>
-          <a:lstStyle/>
-          <a:p>
-            <a:r>
-              <a:t>3 minutos. Sin apuntes. Es para recordar, no cuenta para nota.</a:t>
-            </a:r>
-          </a:p>
-        </p:txBody>
-      </p:sp>
-      <p:sp>
-        <p:nvSpPr>
-          <p:cNvPr id="4" name="Slide Number Placeholder 3"/>
-          <p:cNvSpPr>
-            <a:spLocks noGrp="1"/>
-          </p:cNvSpPr>
-          <p:nvPr>
-            <p:ph type="sldNum" idx="5" sz="quarter"/>
-          </p:nvPr>
-        </p:nvSpPr>
-        <p:spPr/>
-      </p:sp>
-    </p:spTree>
-  </p:cSld>
-  <p:clrMapOvr>
-    <a:masterClrMapping/>
-  </p:clrMapOvr>
-</p:notes>
-</file>
-
-<file path=ppt/notesSlides/notesSlide3.xml><?xml version="1.0" encoding="utf-8"?>
-<p:notes xmlns:a="http://schemas.openxmlformats.org/drawingml/2006/main" xmlns:p="http://schemas.openxmlformats.org/presentationml/2006/main" xmlns:r="http://schemas.openxmlformats.org/officeDocument/2006/relationships">
-  <p:cSld>
-    <p:spTree>
-      <p:nvGrpSpPr>
-        <p:cNvPr id="1" name=""/>
-        <p:cNvGrpSpPr/>
-        <p:nvPr/>
-      </p:nvGrpSpPr>
-      <p:grpSpPr>
-        <a:xfrm>
-          <a:off x="0" y="0"/>
-          <a:ext cx="0" cy="0"/>
-          <a:chOff x="0" y="0"/>
-          <a:chExt cx="0" cy="0"/>
-        </a:xfrm>
-      </p:grpSpPr>
-      <p:sp>
-        <p:nvSpPr>
-          <p:cNvPr id="2" name="Slide Image Placeholder 1"/>
-          <p:cNvSpPr>
-            <a:spLocks noGrp="1"/>
-          </p:cNvSpPr>
-          <p:nvPr>
-            <p:ph type="sldImg" idx="2"/>
-          </p:nvPr>
-        </p:nvSpPr>
-        <p:spPr/>
-      </p:sp>
-      <p:sp>
-        <p:nvSpPr>
-          <p:cNvPr id="3" name="Notes Placeholder 2"/>
-          <p:cNvSpPr>
-            <a:spLocks noGrp="1"/>
-          </p:cNvSpPr>
-          <p:nvPr>
-            <p:ph type="body" idx="3" sz="quarter"/>
-          </p:nvPr>
-        </p:nvSpPr>
-        <p:spPr/>
-        <p:txBody>
-          <a:bodyPr/>
-          <a:lstStyle/>
-          <a:p>
-            <a:r>
-              <a:t>Nadie tiene que contestar: solo pensarlo.</a:t>
-            </a:r>
-          </a:p>
-        </p:txBody>
-      </p:sp>
-      <p:sp>
-        <p:nvSpPr>
-          <p:cNvPr id="4" name="Slide Number Placeholder 3"/>
-          <p:cNvSpPr>
-            <a:spLocks noGrp="1"/>
-          </p:cNvSpPr>
-          <p:nvPr>
-            <p:ph type="sldNum" idx="5" sz="quarter"/>
-          </p:nvPr>
-        </p:nvSpPr>
-        <p:spPr/>
-      </p:sp>
-    </p:spTree>
-  </p:cSld>
-  <p:clrMapOvr>
-    <a:masterClrMapping/>
-  </p:clrMapOvr>
-</p:notes>
-</file>
-
-<file path=ppt/notesSlides/notesSlide4.xml><?xml version="1.0" encoding="utf-8"?>
-<p:notes xmlns:a="http://schemas.openxmlformats.org/drawingml/2006/main" xmlns:p="http://schemas.openxmlformats.org/presentationml/2006/main" xmlns:r="http://schemas.openxmlformats.org/officeDocument/2006/relationships">
-  <p:cSld>
-    <p:spTree>
-      <p:nvGrpSpPr>
-        <p:cNvPr id="1" name=""/>
-        <p:cNvGrpSpPr/>
-        <p:nvPr/>
-      </p:nvGrpSpPr>
-      <p:grpSpPr>
-        <a:xfrm>
-          <a:off x="0" y="0"/>
-          <a:ext cx="0" cy="0"/>
-          <a:chOff x="0" y="0"/>
-          <a:chExt cx="0" cy="0"/>
-        </a:xfrm>
-      </p:grpSpPr>
-      <p:sp>
-        <p:nvSpPr>
-          <p:cNvPr id="2" name="Slide Image Placeholder 1"/>
-          <p:cNvSpPr>
-            <a:spLocks noGrp="1"/>
-          </p:cNvSpPr>
-          <p:nvPr>
-            <p:ph type="sldImg" idx="2"/>
-          </p:nvPr>
-        </p:nvSpPr>
-        <p:spPr/>
-      </p:sp>
-      <p:sp>
-        <p:nvSpPr>
-          <p:cNvPr id="3" name="Notes Placeholder 2"/>
-          <p:cNvSpPr>
-            <a:spLocks noGrp="1"/>
-          </p:cNvSpPr>
-          <p:nvPr>
-            <p:ph type="body" idx="3" sz="quarter"/>
-          </p:nvPr>
-        </p:nvSpPr>
-        <p:spPr/>
-        <p:txBody>
-          <a:bodyPr/>
-          <a:lstStyle/>
-          <a:p>
-            <a:r>
-              <a:t>Dejar unos segundos para que piensen la respuesta fácil antes de enseñar los pasos.</a:t>
-            </a:r>
-          </a:p>
-        </p:txBody>
-      </p:sp>
-      <p:sp>
-        <p:nvSpPr>
-          <p:cNvPr id="4" name="Slide Number Placeholder 3"/>
-          <p:cNvSpPr>
-            <a:spLocks noGrp="1"/>
-          </p:cNvSpPr>
-          <p:nvPr>
-            <p:ph type="sldNum" idx="5" sz="quarter"/>
-          </p:nvPr>
-        </p:nvSpPr>
-        <p:spPr/>
-      </p:sp>
-    </p:spTree>
-  </p:cSld>
-  <p:clrMapOvr>
-    <a:masterClrMapping/>
-  </p:clrMapOvr>
-</p:notes>
-</file>
-
-<file path=ppt/notesSlides/notesSlide5.xml><?xml version="1.0" encoding="utf-8"?>
-<p:notes xmlns:a="http://schemas.openxmlformats.org/drawingml/2006/main" xmlns:p="http://schemas.openxmlformats.org/presentationml/2006/main" xmlns:r="http://schemas.openxmlformats.org/officeDocument/2006/relationships">
-  <p:cSld>
-    <p:spTree>
-      <p:nvGrpSpPr>
-        <p:cNvPr id="1" name=""/>
-        <p:cNvGrpSpPr/>
-        <p:nvPr/>
-      </p:nvGrpSpPr>
-      <p:grpSpPr>
-        <a:xfrm>
-          <a:off x="0" y="0"/>
-          <a:ext cx="0" cy="0"/>
-          <a:chOff x="0" y="0"/>
-          <a:chExt cx="0" cy="0"/>
-        </a:xfrm>
-      </p:grpSpPr>
-      <p:sp>
-        <p:nvSpPr>
-          <p:cNvPr id="2" name="Slide Image Placeholder 1"/>
-          <p:cNvSpPr>
-            <a:spLocks noGrp="1"/>
-          </p:cNvSpPr>
-          <p:nvPr>
-            <p:ph type="sldImg" idx="2"/>
-          </p:nvPr>
-        </p:nvSpPr>
-        <p:spPr/>
-      </p:sp>
-      <p:sp>
-        <p:nvSpPr>
-          <p:cNvPr id="3" name="Notes Placeholder 2"/>
-          <p:cNvSpPr>
-            <a:spLocks noGrp="1"/>
-          </p:cNvSpPr>
-          <p:nvPr>
-            <p:ph type="body" idx="3" sz="quarter"/>
-          </p:nvPr>
-        </p:nvSpPr>
-        <p:spPr/>
-        <p:txBody>
-          <a:bodyPr/>
-          <a:lstStyle/>
-          <a:p>
-            <a:r>
-              <a:t>Dejar 2 minutos para que lo escriban. La diapositiva siguiente muestra el resumen.</a:t>
-            </a:r>
-          </a:p>
-        </p:txBody>
-      </p:sp>
-      <p:sp>
-        <p:nvSpPr>
-          <p:cNvPr id="4" name="Slide Number Placeholder 3"/>
-          <p:cNvSpPr>
-            <a:spLocks noGrp="1"/>
-          </p:cNvSpPr>
-          <p:nvPr>
-            <p:ph type="sldNum" idx="5" sz="quarter"/>
-          </p:nvPr>
-        </p:nvSpPr>
-        <p:spPr/>
-      </p:sp>
-    </p:spTree>
-  </p:cSld>
-  <p:clrMapOvr>
-    <a:masterClrMapping/>
-  </p:clrMapOvr>
-</p:notes>
-</file>
-
-<file path=ppt/notesSlides/notesSlide6.xml><?xml version="1.0" encoding="utf-8"?>
-<p:notes xmlns:a="http://schemas.openxmlformats.org/drawingml/2006/main" xmlns:p="http://schemas.openxmlformats.org/presentationml/2006/main" xmlns:r="http://schemas.openxmlformats.org/officeDocument/2006/relationships">
-  <p:cSld>
-    <p:spTree>
-      <p:nvGrpSpPr>
-        <p:cNvPr id="1" name=""/>
-        <p:cNvGrpSpPr/>
-        <p:nvPr/>
-      </p:nvGrpSpPr>
-      <p:grpSpPr>
-        <a:xfrm>
-          <a:off x="0" y="0"/>
-          <a:ext cx="0" cy="0"/>
-          <a:chOff x="0" y="0"/>
-          <a:chExt cx="0" cy="0"/>
-        </a:xfrm>
-      </p:grpSpPr>
-      <p:sp>
-        <p:nvSpPr>
-          <p:cNvPr id="2" name="Slide Image Placeholder 1"/>
-          <p:cNvSpPr>
-            <a:spLocks noGrp="1"/>
-          </p:cNvSpPr>
-          <p:nvPr>
-            <p:ph type="sldImg" idx="2"/>
-          </p:nvPr>
-        </p:nvSpPr>
-        <p:spPr/>
-      </p:sp>
-      <p:sp>
-        <p:nvSpPr>
-          <p:cNvPr id="3" name="Notes Placeholder 2"/>
-          <p:cNvSpPr>
-            <a:spLocks noGrp="1"/>
-          </p:cNvSpPr>
-          <p:nvPr>
-            <p:ph type="body" idx="3" sz="quarter"/>
-          </p:nvPr>
-        </p:nvSpPr>
-        <p:spPr/>
-        <p:txBody>
-          <a:bodyPr/>
-          <a:lstStyle/>
-          <a:p>
-            <a:r>
-              <a:t>Buscar: «principio de caridad argumentación» · «falacia del hombre de paja ejemplos»</a:t>
-            </a:r>
-          </a:p>
-        </p:txBody>
-      </p:sp>
-      <p:sp>
-        <p:nvSpPr>
-          <p:cNvPr id="4" name="Slide Number Placeholder 3"/>
-          <p:cNvSpPr>
-            <a:spLocks noGrp="1"/>
-          </p:cNvSpPr>
-          <p:nvPr>
-            <p:ph type="sldNum" idx="5" sz="quarter"/>
-          </p:nvPr>
-        </p:nvSpPr>
-        <p:spPr/>
-      </p:sp>
-    </p:spTree>
-  </p:cSld>
-  <p:clrMapOvr>
-    <a:masterClrMapping/>
-  </p:clrMapOvr>
-</p:notes>
 </file>
 
 <file path=ppt/slideLayouts/slideLayout1.xml><?xml version="1.0" encoding="utf-8"?>

--- a/curso/pptx/S58.pptx
+++ b/curso/pptx/S58.pptx
@@ -3718,7 +3718,7 @@
                 </a:solidFill>
                 <a:latin typeface="Fredoka"/>
               </a:rPr>
-              <a:t>Caso 1 · Naiara y los móviles</a:t>
+              <a:t>Caso 1 · Los móviles en clase</a:t>
             </a:r>
           </a:p>
         </p:txBody>
@@ -3800,7 +3800,7 @@
                 </a:solidFill>
                 <a:latin typeface="Nunito Sans"/>
               </a:rPr>
-              <a:t>Naiara: «Los móviles deberían estar prohibidos en clase». Aitor: «O sea, que quieres volver a la Edad de Piedra».</a:t>
+              <a:t>Una chica: «Los móviles deberían estar prohibidos en clase». Un chico: «O sea, que quieres volver a la Edad de Piedra».</a:t>
             </a:r>
           </a:p>
         </p:txBody>
@@ -3848,7 +3848,7 @@
                 </a:solidFill>
                 <a:latin typeface="Nunito Sans"/>
               </a:rPr>
-              <a:t>Aitor deforma la idea: nadie ha dicho «volver a la Edad de Piedra».</a:t>
+              <a:t>El chico deforma la idea: nadie ha dicho «volver a la Edad de Piedra».</a:t>
             </a:r>
           </a:p>
           <a:p>
@@ -4418,7 +4418,7 @@
                 </a:solidFill>
                 <a:latin typeface="Nunito Sans"/>
               </a:rPr>
-              <a:t>Iker escribe: «Todos los que juegan a la consola son unos vagos». Leire contesta: «O sea, que Chen, que juega y saca sobresalientes, es un vago».</a:t>
+              <a:t>Un chico escribe: «Todos los que juegan a la consola son unos vagos». Una chica contesta: «O sea, que un compañero, que juega y saca sobresalientes, es un vago».</a:t>
             </a:r>
           </a:p>
         </p:txBody>
@@ -4466,7 +4466,7 @@
                 </a:solidFill>
                 <a:latin typeface="Nunito Sans"/>
               </a:rPr>
-              <a:t>Leire lleva la idea de Iker a un caso extremo. ¿Es un hombre de paja?</a:t>
+              <a:t>La chica lleva la idea del chico a un caso extremo. ¿Es un hombre de paja?</a:t>
             </a:r>
           </a:p>
           <a:p>
@@ -4491,7 +4491,7 @@
                 </a:solidFill>
                 <a:latin typeface="Nunito Sans"/>
               </a:rPr>
-              <a:t>¿Qué dijo Iker? «Todos». Leire no cambia sus palabras.</a:t>
+              <a:t>¿Qué dijo el chico? «Todos». La chica no cambia sus palabras.</a:t>
             </a:r>
           </a:p>
           <a:p>
@@ -6694,7 +6694,7 @@
                 </a:solidFill>
                 <a:latin typeface="Nunito Sans"/>
               </a:rPr>
-              <a:t>Naiara dice: «Los móviles deberían estar prohibidos en clase». Aitor responde: «O sea, que quieres volver a la Edad de Piedra».</a:t>
+              <a:t>Una chica dice: «Los móviles deberían estar prohibidos en clase». Un chico responde: «O sea, que quieres volver a la Edad de Piedra».</a:t>
             </a:r>
           </a:p>
         </p:txBody>
@@ -6733,7 +6733,7 @@
                 </a:solidFill>
                 <a:latin typeface="Nunito Sans"/>
               </a:rPr>
-              <a:t>¿Ha entendido Aitor lo que quería decir Naiara?</a:t>
+              <a:t>¿Ha entendido ese chico lo que quería decir la chica?</a:t>
             </a:r>
           </a:p>
         </p:txBody>

--- a/curso/pptx/S58.pptx
+++ b/curso/pptx/S58.pptx
@@ -4516,7 +4516,7 @@
                 </a:solidFill>
                 <a:latin typeface="Nunito Sans"/>
               </a:rPr>
-              <a:t>Saca lo que se sigue de lo que él dijo: es un contraejemplo (sesión 11), no una deformación.</a:t>
+              <a:t>Saca lo que se sigue de lo que él dijo: es un contraejemplo (sesión 17), no una deformación.</a:t>
             </a:r>
           </a:p>
           <a:p>
@@ -7096,7 +7096,7 @@
                 </a:solidFill>
                 <a:latin typeface="Nunito Sans"/>
               </a:rPr>
-              <a:t>Es lo contrario del hombre de paja (sesión 15)</a:t>
+              <a:t>Es lo contrario del hombre de paja (sesión 21)</a:t>
             </a:r>
           </a:p>
           <a:p>
